--- a/test-corpus/word-verification/quadrant.pptx
+++ b/test-corpus/word-verification/quadrant.pptx
@@ -144,7 +144,7 @@
         </p:nvSpPr>
         <p:spPr>
           <a:xfrm>
-            <a:off x="3147897" y="1028700"/>
+            <a:off x="1026489" y="1028700"/>
             <a:ext cx="5896207" cy="411799"/>
           </a:xfrm>
           <a:prstGeom prst="rect">
@@ -186,7 +186,7 @@
         </p:nvSpPr>
         <p:spPr>
           <a:xfrm>
-            <a:off x="6610749" y="1440499"/>
+            <a:off x="4489341" y="1440499"/>
             <a:ext cx="2246174" cy="2246174"/>
           </a:xfrm>
           <a:prstGeom prst="rect">
@@ -210,7 +210,7 @@
         </p:nvSpPr>
         <p:spPr>
           <a:xfrm>
-            <a:off x="6666903" y="1477935"/>
+            <a:off x="4545495" y="1477935"/>
             <a:ext cx="2133866" cy="187181"/>
           </a:xfrm>
           <a:prstGeom prst="rect">
@@ -252,7 +252,7 @@
         </p:nvSpPr>
         <p:spPr>
           <a:xfrm>
-            <a:off x="4364575" y="1440499"/>
+            <a:off x="2243167" y="1440499"/>
             <a:ext cx="2246174" cy="2246174"/>
           </a:xfrm>
           <a:prstGeom prst="rect">
@@ -276,7 +276,7 @@
         </p:nvSpPr>
         <p:spPr>
           <a:xfrm>
-            <a:off x="4420729" y="1477935"/>
+            <a:off x="2299321" y="1477935"/>
             <a:ext cx="2133866" cy="187181"/>
           </a:xfrm>
           <a:prstGeom prst="rect">
@@ -318,7 +318,7 @@
         </p:nvSpPr>
         <p:spPr>
           <a:xfrm>
-            <a:off x="4364575" y="3686673"/>
+            <a:off x="2243167" y="3686673"/>
             <a:ext cx="2246174" cy="2246174"/>
           </a:xfrm>
           <a:prstGeom prst="rect">
@@ -342,7 +342,7 @@
         </p:nvSpPr>
         <p:spPr>
           <a:xfrm>
-            <a:off x="4420729" y="3724109"/>
+            <a:off x="2299321" y="3724109"/>
             <a:ext cx="2133866" cy="187181"/>
           </a:xfrm>
           <a:prstGeom prst="rect">
@@ -384,7 +384,7 @@
         </p:nvSpPr>
         <p:spPr>
           <a:xfrm>
-            <a:off x="6610749" y="3686673"/>
+            <a:off x="4489341" y="3686673"/>
             <a:ext cx="2246174" cy="2246174"/>
           </a:xfrm>
           <a:prstGeom prst="rect">
@@ -408,7 +408,7 @@
         </p:nvSpPr>
         <p:spPr>
           <a:xfrm>
-            <a:off x="6666903" y="3724109"/>
+            <a:off x="4545495" y="3724109"/>
             <a:ext cx="2133866" cy="187181"/>
           </a:xfrm>
           <a:prstGeom prst="rect">
@@ -450,7 +450,7 @@
         </p:nvSpPr>
         <p:spPr>
           <a:xfrm>
-            <a:off x="4364575" y="5989001"/>
+            <a:off x="2243167" y="5989001"/>
             <a:ext cx="2246174" cy="187181"/>
           </a:xfrm>
           <a:prstGeom prst="rect">
@@ -492,7 +492,7 @@
         </p:nvSpPr>
         <p:spPr>
           <a:xfrm>
-            <a:off x="6610749" y="5989001"/>
+            <a:off x="4489341" y="5989001"/>
             <a:ext cx="2246174" cy="187181"/>
           </a:xfrm>
           <a:prstGeom prst="rect">
@@ -534,7 +534,7 @@
         </p:nvSpPr>
         <p:spPr>
           <a:xfrm>
-            <a:off x="3147897" y="5745666"/>
+            <a:off x="1026489" y="5745666"/>
             <a:ext cx="1160523" cy="187181"/>
           </a:xfrm>
           <a:prstGeom prst="rect">
@@ -576,7 +576,7 @@
         </p:nvSpPr>
         <p:spPr>
           <a:xfrm>
-            <a:off x="3147897" y="1440499"/>
+            <a:off x="1026489" y="1440499"/>
             <a:ext cx="1160523" cy="187181"/>
           </a:xfrm>
           <a:prstGeom prst="rect">
@@ -618,7 +618,7 @@
         </p:nvSpPr>
         <p:spPr>
           <a:xfrm>
-            <a:off x="5665484" y="3190643"/>
+            <a:off x="3544076" y="3190643"/>
             <a:ext cx="93591" cy="93591"/>
           </a:xfrm>
           <a:prstGeom prst="ellipse">
@@ -642,7 +642,7 @@
         </p:nvSpPr>
         <p:spPr>
           <a:xfrm>
-            <a:off x="5787152" y="3153206"/>
+            <a:off x="3665744" y="3153206"/>
             <a:ext cx="737494" cy="168463"/>
           </a:xfrm>
           <a:prstGeom prst="rect">
@@ -684,7 +684,7 @@
         </p:nvSpPr>
         <p:spPr>
           <a:xfrm>
-            <a:off x="6339336" y="4852812"/>
+            <a:off x="4217928" y="4852812"/>
             <a:ext cx="93591" cy="93591"/>
           </a:xfrm>
           <a:prstGeom prst="ellipse">
@@ -708,7 +708,7 @@
         </p:nvSpPr>
         <p:spPr>
           <a:xfrm>
-            <a:off x="6461004" y="4815375"/>
+            <a:off x="4339596" y="4815375"/>
             <a:ext cx="737494" cy="168463"/>
           </a:xfrm>
           <a:prstGeom prst="rect">
@@ -750,7 +750,7 @@
         </p:nvSpPr>
         <p:spPr>
           <a:xfrm>
-            <a:off x="6878418" y="2786331"/>
+            <a:off x="4757010" y="2786331"/>
             <a:ext cx="93591" cy="93591"/>
           </a:xfrm>
           <a:prstGeom prst="ellipse">
@@ -774,7 +774,7 @@
         </p:nvSpPr>
         <p:spPr>
           <a:xfrm>
-            <a:off x="7000086" y="2748895"/>
+            <a:off x="4878678" y="2748895"/>
             <a:ext cx="737494" cy="168463"/>
           </a:xfrm>
           <a:prstGeom prst="rect">
@@ -816,7 +816,7 @@
         </p:nvSpPr>
         <p:spPr>
           <a:xfrm>
-            <a:off x="7821811" y="4358653"/>
+            <a:off x="5700403" y="4358653"/>
             <a:ext cx="93591" cy="93591"/>
           </a:xfrm>
           <a:prstGeom prst="ellipse">
@@ -840,7 +840,7 @@
         </p:nvSpPr>
         <p:spPr>
           <a:xfrm>
-            <a:off x="7943479" y="4321217"/>
+            <a:off x="5822071" y="4321217"/>
             <a:ext cx="737494" cy="168463"/>
           </a:xfrm>
           <a:prstGeom prst="rect">
@@ -870,6 +870,192 @@
                 </a:solidFill>
               </a:rPr>
               <a:t>Campaign D</a:t>
+            </a:r>
+          </a:p>
+        </p:txBody>
+      </p:sp>
+      <p:sp>
+        <p:nvSpPr>
+          <p:cNvPr id="4" name="Mermaid source"/>
+          <p:cNvSpPr/>
+          <p:nvPr/>
+        </p:nvSpPr>
+        <p:spPr>
+          <a:xfrm>
+            <a:off x="7674864" y="1028700"/>
+            <a:ext cx="4059936" cy="5372100"/>
+          </a:xfrm>
+          <a:prstGeom prst="rect">
+            <a:avLst/>
+          </a:prstGeom>
+          <a:solidFill>
+            <a:srgbClr val="F3F4F6"/>
+          </a:solidFill>
+          <a:ln w="9525">
+            <a:solidFill>
+              <a:srgbClr val="D1D5DB"/>
+            </a:solidFill>
+          </a:ln>
+        </p:spPr>
+        <p:txBody>
+          <a:bodyPr wrap="square" lIns="91440" tIns="45720" rIns="91440" bIns="45720" anchor="t">
+            <a:noAutofit/>
+          </a:bodyPr>
+          <a:lstStyle/>
+          <a:p>
+            <a:pPr algn="l"/>
+            <a:r>
+              <a:rPr lang="en-US" sz="1400" dirty="0">
+                <a:solidFill>
+                  <a:srgbClr val="1F2937"/>
+                </a:solidFill>
+                <a:latin typeface="Consolas"/>
+                <a:cs typeface="Consolas"/>
+              </a:rPr>
+              <a:t>quadrantChart</a:t>
+            </a:r>
+          </a:p>
+          <a:p>
+            <a:pPr algn="l"/>
+            <a:r>
+              <a:rPr lang="en-US" sz="1400" dirty="0">
+                <a:solidFill>
+                  <a:srgbClr val="1F2937"/>
+                </a:solidFill>
+                <a:latin typeface="Consolas"/>
+                <a:cs typeface="Consolas"/>
+              </a:rPr>
+              <a:t>    title Reach and engagement of campaigns</a:t>
+            </a:r>
+          </a:p>
+          <a:p>
+            <a:pPr algn="l"/>
+            <a:r>
+              <a:rPr lang="en-US" sz="1400" dirty="0">
+                <a:solidFill>
+                  <a:srgbClr val="1F2937"/>
+                </a:solidFill>
+                <a:latin typeface="Consolas"/>
+                <a:cs typeface="Consolas"/>
+              </a:rPr>
+              <a:t>    x-axis Low Reach --&gt; High Reach</a:t>
+            </a:r>
+          </a:p>
+          <a:p>
+            <a:pPr algn="l"/>
+            <a:r>
+              <a:rPr lang="en-US" sz="1400" dirty="0">
+                <a:solidFill>
+                  <a:srgbClr val="1F2937"/>
+                </a:solidFill>
+                <a:latin typeface="Consolas"/>
+                <a:cs typeface="Consolas"/>
+              </a:rPr>
+              <a:t>    y-axis Low Engagement --&gt; High Engagement</a:t>
+            </a:r>
+          </a:p>
+          <a:p>
+            <a:pPr algn="l"/>
+            <a:r>
+              <a:rPr lang="en-US" sz="1400" dirty="0">
+                <a:solidFill>
+                  <a:srgbClr val="1F2937"/>
+                </a:solidFill>
+                <a:latin typeface="Consolas"/>
+                <a:cs typeface="Consolas"/>
+              </a:rPr>
+              <a:t>    quadrant-1 We should expand</a:t>
+            </a:r>
+          </a:p>
+          <a:p>
+            <a:pPr algn="l"/>
+            <a:r>
+              <a:rPr lang="en-US" sz="1400" dirty="0">
+                <a:solidFill>
+                  <a:srgbClr val="1F2937"/>
+                </a:solidFill>
+                <a:latin typeface="Consolas"/>
+                <a:cs typeface="Consolas"/>
+              </a:rPr>
+              <a:t>    quadrant-2 Need to promote</a:t>
+            </a:r>
+          </a:p>
+          <a:p>
+            <a:pPr algn="l"/>
+            <a:r>
+              <a:rPr lang="en-US" sz="1400" dirty="0">
+                <a:solidFill>
+                  <a:srgbClr val="1F2937"/>
+                </a:solidFill>
+                <a:latin typeface="Consolas"/>
+                <a:cs typeface="Consolas"/>
+              </a:rPr>
+              <a:t>    quadrant-3 Re-evaluate</a:t>
+            </a:r>
+          </a:p>
+          <a:p>
+            <a:pPr algn="l"/>
+            <a:r>
+              <a:rPr lang="en-US" sz="1400" dirty="0">
+                <a:solidFill>
+                  <a:srgbClr val="1F2937"/>
+                </a:solidFill>
+                <a:latin typeface="Consolas"/>
+                <a:cs typeface="Consolas"/>
+              </a:rPr>
+              <a:t>    quadrant-4 May be improved</a:t>
+            </a:r>
+          </a:p>
+          <a:p>
+            <a:pPr algn="l"/>
+            <a:r>
+              <a:rPr lang="en-US" sz="1400" dirty="0">
+                <a:solidFill>
+                  <a:srgbClr val="1F2937"/>
+                </a:solidFill>
+                <a:latin typeface="Consolas"/>
+                <a:cs typeface="Consolas"/>
+              </a:rPr>
+              <a:t>    Campaign A: [0.3, 0.6]</a:t>
+            </a:r>
+          </a:p>
+          <a:p>
+            <a:pPr algn="l"/>
+            <a:r>
+              <a:rPr lang="en-US" sz="1400" dirty="0">
+                <a:solidFill>
+                  <a:srgbClr val="1F2937"/>
+                </a:solidFill>
+                <a:latin typeface="Consolas"/>
+                <a:cs typeface="Consolas"/>
+              </a:rPr>
+              <a:t>    Campaign B: [0.45, 0.23]</a:t>
+            </a:r>
+          </a:p>
+          <a:p>
+            <a:pPr algn="l"/>
+            <a:r>
+              <a:rPr lang="en-US" sz="1400" dirty="0">
+                <a:solidFill>
+                  <a:srgbClr val="1F2937"/>
+                </a:solidFill>
+                <a:latin typeface="Consolas"/>
+                <a:cs typeface="Consolas"/>
+              </a:rPr>
+              <a:t>    Campaign C: [0.57, 0.69] color: #ff3300</a:t>
+            </a:r>
+          </a:p>
+          <a:p>
+            <a:pPr algn="l"/>
+            <a:r>
+              <a:rPr lang="en-US" sz="1400" dirty="0">
+                <a:solidFill>
+                  <a:srgbClr val="1F2937"/>
+                </a:solidFill>
+                <a:latin typeface="Consolas"/>
+                <a:cs typeface="Consolas"/>
+              </a:rPr>
+              <a:t>    Campaign D: [0.78, 0.34]</a:t>
             </a:r>
           </a:p>
         </p:txBody>
